--- a/ppt.pptx
+++ b/ppt.pptx
@@ -6,11 +6,6 @@
   </p:sldMasterIdLst>
   <p:sldIdLst>
     <p:sldId id="256" r:id="rId2"/>
-    <p:sldId id="259" r:id="rId3"/>
-    <p:sldId id="257" r:id="rId4"/>
-    <p:sldId id="258" r:id="rId5"/>
-    <p:sldId id="260" r:id="rId6"/>
-    <p:sldId id="261" r:id="rId7"/>
   </p:sldIdLst>
   <p:sldSz cx="12192000" cy="6858000"/>
   <p:notesSz cx="6858000" cy="9144000"/>
@@ -264,7 +259,7 @@
           <a:p>
             <a:fld id="{F1F225CB-A77B-6C40-AE15-9CA716D9E64E}" type="datetimeFigureOut">
               <a:rPr lang="it-IT" smtClean="0"/>
-              <a:t>15/01/26</a:t>
+              <a:t>20/01/26</a:t>
             </a:fld>
             <a:endParaRPr lang="it-IT"/>
           </a:p>
@@ -462,7 +457,7 @@
           <a:p>
             <a:fld id="{F1F225CB-A77B-6C40-AE15-9CA716D9E64E}" type="datetimeFigureOut">
               <a:rPr lang="it-IT" smtClean="0"/>
-              <a:t>15/01/26</a:t>
+              <a:t>20/01/26</a:t>
             </a:fld>
             <a:endParaRPr lang="it-IT"/>
           </a:p>
@@ -670,7 +665,7 @@
           <a:p>
             <a:fld id="{F1F225CB-A77B-6C40-AE15-9CA716D9E64E}" type="datetimeFigureOut">
               <a:rPr lang="it-IT" smtClean="0"/>
-              <a:t>15/01/26</a:t>
+              <a:t>20/01/26</a:t>
             </a:fld>
             <a:endParaRPr lang="it-IT"/>
           </a:p>
@@ -868,7 +863,7 @@
           <a:p>
             <a:fld id="{F1F225CB-A77B-6C40-AE15-9CA716D9E64E}" type="datetimeFigureOut">
               <a:rPr lang="it-IT" smtClean="0"/>
-              <a:t>15/01/26</a:t>
+              <a:t>20/01/26</a:t>
             </a:fld>
             <a:endParaRPr lang="it-IT"/>
           </a:p>
@@ -1143,7 +1138,7 @@
           <a:p>
             <a:fld id="{F1F225CB-A77B-6C40-AE15-9CA716D9E64E}" type="datetimeFigureOut">
               <a:rPr lang="it-IT" smtClean="0"/>
-              <a:t>15/01/26</a:t>
+              <a:t>20/01/26</a:t>
             </a:fld>
             <a:endParaRPr lang="it-IT"/>
           </a:p>
@@ -1408,7 +1403,7 @@
           <a:p>
             <a:fld id="{F1F225CB-A77B-6C40-AE15-9CA716D9E64E}" type="datetimeFigureOut">
               <a:rPr lang="it-IT" smtClean="0"/>
-              <a:t>15/01/26</a:t>
+              <a:t>20/01/26</a:t>
             </a:fld>
             <a:endParaRPr lang="it-IT"/>
           </a:p>
@@ -1820,7 +1815,7 @@
           <a:p>
             <a:fld id="{F1F225CB-A77B-6C40-AE15-9CA716D9E64E}" type="datetimeFigureOut">
               <a:rPr lang="it-IT" smtClean="0"/>
-              <a:t>15/01/26</a:t>
+              <a:t>20/01/26</a:t>
             </a:fld>
             <a:endParaRPr lang="it-IT"/>
           </a:p>
@@ -1961,7 +1956,7 @@
           <a:p>
             <a:fld id="{F1F225CB-A77B-6C40-AE15-9CA716D9E64E}" type="datetimeFigureOut">
               <a:rPr lang="it-IT" smtClean="0"/>
-              <a:t>15/01/26</a:t>
+              <a:t>20/01/26</a:t>
             </a:fld>
             <a:endParaRPr lang="it-IT"/>
           </a:p>
@@ -2074,7 +2069,7 @@
           <a:p>
             <a:fld id="{F1F225CB-A77B-6C40-AE15-9CA716D9E64E}" type="datetimeFigureOut">
               <a:rPr lang="it-IT" smtClean="0"/>
-              <a:t>15/01/26</a:t>
+              <a:t>20/01/26</a:t>
             </a:fld>
             <a:endParaRPr lang="it-IT"/>
           </a:p>
@@ -2385,7 +2380,7 @@
           <a:p>
             <a:fld id="{F1F225CB-A77B-6C40-AE15-9CA716D9E64E}" type="datetimeFigureOut">
               <a:rPr lang="it-IT" smtClean="0"/>
-              <a:t>15/01/26</a:t>
+              <a:t>20/01/26</a:t>
             </a:fld>
             <a:endParaRPr lang="it-IT"/>
           </a:p>
@@ -2673,7 +2668,7 @@
           <a:p>
             <a:fld id="{F1F225CB-A77B-6C40-AE15-9CA716D9E64E}" type="datetimeFigureOut">
               <a:rPr lang="it-IT" smtClean="0"/>
-              <a:t>15/01/26</a:t>
+              <a:t>20/01/26</a:t>
             </a:fld>
             <a:endParaRPr lang="it-IT"/>
           </a:p>
@@ -2914,7 +2909,7 @@
           <a:p>
             <a:fld id="{F1F225CB-A77B-6C40-AE15-9CA716D9E64E}" type="datetimeFigureOut">
               <a:rPr lang="it-IT" smtClean="0"/>
-              <a:t>15/01/26</a:t>
+              <a:t>20/01/26</a:t>
             </a:fld>
             <a:endParaRPr lang="it-IT"/>
           </a:p>
@@ -3384,7 +3379,7 @@
         </p:nvSpPr>
         <p:spPr>
           <a:xfrm>
-            <a:off x="8116691" y="2331181"/>
+            <a:off x="9076062" y="1482882"/>
             <a:ext cx="930063" cy="369332"/>
           </a:xfrm>
           <a:prstGeom prst="rect">
@@ -3474,7 +3469,7 @@
         </p:blipFill>
         <p:spPr bwMode="auto">
           <a:xfrm>
-            <a:off x="8313777" y="1734600"/>
+            <a:off x="9273148" y="886301"/>
             <a:ext cx="560084" cy="560084"/>
           </a:xfrm>
           <a:prstGeom prst="rect">
@@ -3694,1306 +3689,10 @@
           </a:prstGeom>
         </p:spPr>
       </p:pic>
-      <p:sp>
-        <p:nvSpPr>
-          <p:cNvPr id="13" name="Rettangolo con angoli arrotondati 12">
-            <a:extLst>
-              <a:ext uri="{FF2B5EF4-FFF2-40B4-BE49-F238E27FC236}">
-                <a16:creationId xmlns:a16="http://schemas.microsoft.com/office/drawing/2014/main" id="{0C94D332-6239-78E5-15CC-60B91B64253A}"/>
-              </a:ext>
-            </a:extLst>
-          </p:cNvPr>
-          <p:cNvSpPr/>
-          <p:nvPr/>
-        </p:nvSpPr>
-        <p:spPr>
-          <a:xfrm>
-            <a:off x="274924" y="161366"/>
-            <a:ext cx="4001240" cy="4531658"/>
-          </a:xfrm>
-          <a:prstGeom prst="roundRect">
-            <a:avLst>
-              <a:gd name="adj" fmla="val 4232"/>
-            </a:avLst>
-          </a:prstGeom>
-          <a:noFill/>
-        </p:spPr>
-        <p:style>
-          <a:lnRef idx="2">
-            <a:schemeClr val="accent1">
-              <a:shade val="15000"/>
-            </a:schemeClr>
-          </a:lnRef>
-          <a:fillRef idx="1">
-            <a:schemeClr val="accent1"/>
-          </a:fillRef>
-          <a:effectRef idx="0">
-            <a:schemeClr val="accent1"/>
-          </a:effectRef>
-          <a:fontRef idx="minor">
-            <a:schemeClr val="lt1"/>
-          </a:fontRef>
-        </p:style>
-        <p:txBody>
-          <a:bodyPr rtlCol="0" anchor="ctr"/>
-          <a:lstStyle/>
-          <a:p>
-            <a:pPr algn="ctr"/>
-            <a:endParaRPr lang="it-IT"/>
-          </a:p>
-        </p:txBody>
-      </p:sp>
-      <p:sp>
-        <p:nvSpPr>
-          <p:cNvPr id="14" name="TextBox 24">
-            <a:extLst>
-              <a:ext uri="{FF2B5EF4-FFF2-40B4-BE49-F238E27FC236}">
-                <a16:creationId xmlns:a16="http://schemas.microsoft.com/office/drawing/2014/main" id="{B4EC6323-8494-BC43-7129-5F17D365E3CC}"/>
-              </a:ext>
-            </a:extLst>
-          </p:cNvPr>
-          <p:cNvSpPr txBox="1"/>
-          <p:nvPr/>
-        </p:nvSpPr>
-        <p:spPr>
-          <a:xfrm>
-            <a:off x="632305" y="216001"/>
-            <a:ext cx="3286477" cy="369332"/>
-          </a:xfrm>
-          <a:prstGeom prst="rect">
-            <a:avLst/>
-          </a:prstGeom>
-          <a:noFill/>
-        </p:spPr>
-        <p:txBody>
-          <a:bodyPr wrap="none" rtlCol="0">
-            <a:spAutoFit/>
-          </a:bodyPr>
-          <a:lstStyle/>
-          <a:p>
-            <a:r>
-              <a:rPr lang="it-IT" b="1" dirty="0">
-                <a:latin typeface="CMU Serif" panose="02000603000000000000" pitchFamily="2" charset="0"/>
-                <a:ea typeface="CMU Serif" panose="02000603000000000000" pitchFamily="2" charset="0"/>
-                <a:cs typeface="CMU Serif" panose="02000603000000000000" pitchFamily="2" charset="0"/>
-              </a:rPr>
-              <a:t>Federated Learning 𝑅final </a:t>
-            </a:r>
-          </a:p>
-        </p:txBody>
-      </p:sp>
     </p:spTree>
     <p:extLst>
       <p:ext uri="{BB962C8B-B14F-4D97-AF65-F5344CB8AC3E}">
         <p14:creationId xmlns:p14="http://schemas.microsoft.com/office/powerpoint/2010/main" val="664486069"/>
-      </p:ext>
-    </p:extLst>
-  </p:cSld>
-  <p:clrMapOvr>
-    <a:masterClrMapping/>
-  </p:clrMapOvr>
-</p:sld>
-</file>
-
-<file path=ppt/slides/slide2.xml><?xml version="1.0" encoding="utf-8"?>
-<p:sld xmlns:a="http://schemas.openxmlformats.org/drawingml/2006/main" xmlns:r="http://schemas.openxmlformats.org/officeDocument/2006/relationships" xmlns:p="http://schemas.openxmlformats.org/presentationml/2006/main">
-  <p:cSld>
-    <p:spTree>
-      <p:nvGrpSpPr>
-        <p:cNvPr id="1" name="">
-          <a:extLst>
-            <a:ext uri="{FF2B5EF4-FFF2-40B4-BE49-F238E27FC236}">
-              <a16:creationId xmlns:a16="http://schemas.microsoft.com/office/drawing/2014/main" id="{379BE04E-758F-3D09-D676-836FADBB1340}"/>
-            </a:ext>
-          </a:extLst>
-        </p:cNvPr>
-        <p:cNvGrpSpPr/>
-        <p:nvPr/>
-      </p:nvGrpSpPr>
-      <p:grpSpPr>
-        <a:xfrm>
-          <a:off x="0" y="0"/>
-          <a:ext cx="0" cy="0"/>
-          <a:chOff x="0" y="0"/>
-          <a:chExt cx="0" cy="0"/>
-        </a:xfrm>
-      </p:grpSpPr>
-      <p:sp>
-        <p:nvSpPr>
-          <p:cNvPr id="2" name="TextBox 24">
-            <a:extLst>
-              <a:ext uri="{FF2B5EF4-FFF2-40B4-BE49-F238E27FC236}">
-                <a16:creationId xmlns:a16="http://schemas.microsoft.com/office/drawing/2014/main" id="{79F6DAAA-3860-6353-2AF1-559092C10065}"/>
-              </a:ext>
-            </a:extLst>
-          </p:cNvPr>
-          <p:cNvSpPr txBox="1"/>
-          <p:nvPr/>
-        </p:nvSpPr>
-        <p:spPr>
-          <a:xfrm>
-            <a:off x="315265" y="1358346"/>
-            <a:ext cx="992579" cy="369332"/>
-          </a:xfrm>
-          <a:prstGeom prst="rect">
-            <a:avLst/>
-          </a:prstGeom>
-          <a:noFill/>
-        </p:spPr>
-        <p:txBody>
-          <a:bodyPr wrap="none" rtlCol="0">
-            <a:spAutoFit/>
-          </a:bodyPr>
-          <a:lstStyle/>
-          <a:p>
-            <a:r>
-              <a:rPr lang="it-IT" dirty="0">
-                <a:latin typeface="CMU Serif" panose="02000603000000000000" pitchFamily="2" charset="0"/>
-                <a:ea typeface="CMU Serif" panose="02000603000000000000" pitchFamily="2" charset="0"/>
-                <a:cs typeface="CMU Serif" panose="02000603000000000000" pitchFamily="2" charset="0"/>
-              </a:rPr>
-              <a:t>Client 1</a:t>
-            </a:r>
-          </a:p>
-        </p:txBody>
-      </p:sp>
-      <p:sp>
-        <p:nvSpPr>
-          <p:cNvPr id="3" name="TextBox 1056">
-            <a:extLst>
-              <a:ext uri="{FF2B5EF4-FFF2-40B4-BE49-F238E27FC236}">
-                <a16:creationId xmlns:a16="http://schemas.microsoft.com/office/drawing/2014/main" id="{3F656E46-FC41-E320-D130-4310B5067B78}"/>
-              </a:ext>
-            </a:extLst>
-          </p:cNvPr>
-          <p:cNvSpPr txBox="1"/>
-          <p:nvPr/>
-        </p:nvSpPr>
-        <p:spPr>
-          <a:xfrm>
-            <a:off x="8116691" y="2331181"/>
-            <a:ext cx="930063" cy="369332"/>
-          </a:xfrm>
-          <a:prstGeom prst="rect">
-            <a:avLst/>
-          </a:prstGeom>
-          <a:noFill/>
-        </p:spPr>
-        <p:txBody>
-          <a:bodyPr wrap="none" rtlCol="0">
-            <a:spAutoFit/>
-          </a:bodyPr>
-          <a:lstStyle/>
-          <a:p>
-            <a:r>
-              <a:rPr lang="it-IT" b="1" dirty="0">
-                <a:latin typeface="CMU Serif" panose="02000603000000000000" pitchFamily="2" charset="0"/>
-                <a:ea typeface="CMU Serif" panose="02000603000000000000" pitchFamily="2" charset="0"/>
-                <a:cs typeface="CMU Serif" panose="02000603000000000000" pitchFamily="2" charset="0"/>
-              </a:rPr>
-              <a:t>Server</a:t>
-            </a:r>
-          </a:p>
-        </p:txBody>
-      </p:sp>
-      <p:pic>
-        <p:nvPicPr>
-          <p:cNvPr id="4" name="Picture 1" descr="A black background with a black square&#10;&#10;Description automatically generated with medium confidence">
-            <a:extLst>
-              <a:ext uri="{FF2B5EF4-FFF2-40B4-BE49-F238E27FC236}">
-                <a16:creationId xmlns:a16="http://schemas.microsoft.com/office/drawing/2014/main" id="{9F7E1C56-FD10-1393-0165-B58044B67552}"/>
-              </a:ext>
-            </a:extLst>
-          </p:cNvPr>
-          <p:cNvPicPr>
-            <a:picLocks noChangeAspect="1"/>
-          </p:cNvPicPr>
-          <p:nvPr/>
-        </p:nvPicPr>
-        <p:blipFill>
-          <a:blip r:embed="rId2">
-            <a:extLst>
-              <a:ext uri="{28A0092B-C50C-407E-A947-70E740481C1C}">
-                <a14:useLocalDpi xmlns:a14="http://schemas.microsoft.com/office/drawing/2010/main" val="0"/>
-              </a:ext>
-            </a:extLst>
-          </a:blip>
-          <a:stretch>
-            <a:fillRect/>
-          </a:stretch>
-        </p:blipFill>
-        <p:spPr>
-          <a:xfrm>
-            <a:off x="480634" y="731462"/>
-            <a:ext cx="612340" cy="612340"/>
-          </a:xfrm>
-          <a:prstGeom prst="rect">
-            <a:avLst/>
-          </a:prstGeom>
-        </p:spPr>
-      </p:pic>
-      <p:pic>
-        <p:nvPicPr>
-          <p:cNvPr id="5" name="Picture 26" descr="Server icons for free download | Freepik">
-            <a:extLst>
-              <a:ext uri="{FF2B5EF4-FFF2-40B4-BE49-F238E27FC236}">
-                <a16:creationId xmlns:a16="http://schemas.microsoft.com/office/drawing/2014/main" id="{8BB48B5A-8F18-963B-FDC9-531774080955}"/>
-              </a:ext>
-            </a:extLst>
-          </p:cNvPr>
-          <p:cNvPicPr>
-            <a:picLocks noChangeAspect="1" noChangeArrowheads="1"/>
-          </p:cNvPicPr>
-          <p:nvPr/>
-        </p:nvPicPr>
-        <p:blipFill>
-          <a:blip r:embed="rId3">
-            <a:extLst>
-              <a:ext uri="{28A0092B-C50C-407E-A947-70E740481C1C}">
-                <a14:useLocalDpi xmlns:a14="http://schemas.microsoft.com/office/drawing/2010/main" val="0"/>
-              </a:ext>
-            </a:extLst>
-          </a:blip>
-          <a:srcRect/>
-          <a:stretch>
-            <a:fillRect/>
-          </a:stretch>
-        </p:blipFill>
-        <p:spPr bwMode="auto">
-          <a:xfrm>
-            <a:off x="8313777" y="1734600"/>
-            <a:ext cx="560084" cy="560084"/>
-          </a:xfrm>
-          <a:prstGeom prst="rect">
-            <a:avLst/>
-          </a:prstGeom>
-          <a:noFill/>
-          <a:extLst>
-            <a:ext uri="{909E8E84-426E-40DD-AFC4-6F175D3DCCD1}">
-              <a14:hiddenFill xmlns:a14="http://schemas.microsoft.com/office/drawing/2010/main">
-                <a:solidFill>
-                  <a:srgbClr val="FFFFFF"/>
-                </a:solidFill>
-              </a14:hiddenFill>
-            </a:ext>
-          </a:extLst>
-        </p:spPr>
-      </p:pic>
-      <p:sp>
-        <p:nvSpPr>
-          <p:cNvPr id="7" name="TextBox 24">
-            <a:extLst>
-              <a:ext uri="{FF2B5EF4-FFF2-40B4-BE49-F238E27FC236}">
-                <a16:creationId xmlns:a16="http://schemas.microsoft.com/office/drawing/2014/main" id="{B89A76E2-EDD7-3AFA-48EE-9F4770330D82}"/>
-              </a:ext>
-            </a:extLst>
-          </p:cNvPr>
-          <p:cNvSpPr txBox="1"/>
-          <p:nvPr/>
-        </p:nvSpPr>
-        <p:spPr>
-          <a:xfrm>
-            <a:off x="569671" y="3031308"/>
-            <a:ext cx="377026" cy="369332"/>
-          </a:xfrm>
-          <a:prstGeom prst="rect">
-            <a:avLst/>
-          </a:prstGeom>
-          <a:noFill/>
-        </p:spPr>
-        <p:txBody>
-          <a:bodyPr wrap="none" rtlCol="0">
-            <a:spAutoFit/>
-          </a:bodyPr>
-          <a:lstStyle/>
-          <a:p>
-            <a:r>
-              <a:rPr lang="it-IT" dirty="0">
-                <a:latin typeface="CMU Serif" panose="02000603000000000000" pitchFamily="2" charset="0"/>
-                <a:ea typeface="CMU Serif" panose="02000603000000000000" pitchFamily="2" charset="0"/>
-                <a:cs typeface="CMU Serif" panose="02000603000000000000" pitchFamily="2" charset="0"/>
-              </a:rPr>
-              <a:t>…</a:t>
-            </a:r>
-          </a:p>
-        </p:txBody>
-      </p:sp>
-      <p:sp>
-        <p:nvSpPr>
-          <p:cNvPr id="9" name="TextBox 24">
-            <a:extLst>
-              <a:ext uri="{FF2B5EF4-FFF2-40B4-BE49-F238E27FC236}">
-                <a16:creationId xmlns:a16="http://schemas.microsoft.com/office/drawing/2014/main" id="{4626D698-7F1A-EA25-4B9F-EE8573A429C0}"/>
-              </a:ext>
-            </a:extLst>
-          </p:cNvPr>
-          <p:cNvSpPr txBox="1"/>
-          <p:nvPr/>
-        </p:nvSpPr>
-        <p:spPr>
-          <a:xfrm>
-            <a:off x="274924" y="2479098"/>
-            <a:ext cx="992579" cy="369332"/>
-          </a:xfrm>
-          <a:prstGeom prst="rect">
-            <a:avLst/>
-          </a:prstGeom>
-          <a:noFill/>
-        </p:spPr>
-        <p:txBody>
-          <a:bodyPr wrap="none" rtlCol="0">
-            <a:spAutoFit/>
-          </a:bodyPr>
-          <a:lstStyle/>
-          <a:p>
-            <a:r>
-              <a:rPr lang="it-IT" dirty="0">
-                <a:latin typeface="CMU Serif" panose="02000603000000000000" pitchFamily="2" charset="0"/>
-                <a:ea typeface="CMU Serif" panose="02000603000000000000" pitchFamily="2" charset="0"/>
-                <a:cs typeface="CMU Serif" panose="02000603000000000000" pitchFamily="2" charset="0"/>
-              </a:rPr>
-              <a:t>Client 2</a:t>
-            </a:r>
-          </a:p>
-        </p:txBody>
-      </p:sp>
-      <p:pic>
-        <p:nvPicPr>
-          <p:cNvPr id="10" name="Picture 1" descr="A black background with a black square&#10;&#10;Description automatically generated with medium confidence">
-            <a:extLst>
-              <a:ext uri="{FF2B5EF4-FFF2-40B4-BE49-F238E27FC236}">
-                <a16:creationId xmlns:a16="http://schemas.microsoft.com/office/drawing/2014/main" id="{0F039F1F-3BC0-4440-379C-0D588B775B2F}"/>
-              </a:ext>
-            </a:extLst>
-          </p:cNvPr>
-          <p:cNvPicPr>
-            <a:picLocks noChangeAspect="1"/>
-          </p:cNvPicPr>
-          <p:nvPr/>
-        </p:nvPicPr>
-        <p:blipFill>
-          <a:blip r:embed="rId2">
-            <a:extLst>
-              <a:ext uri="{28A0092B-C50C-407E-A947-70E740481C1C}">
-                <a14:useLocalDpi xmlns:a14="http://schemas.microsoft.com/office/drawing/2010/main" val="0"/>
-              </a:ext>
-            </a:extLst>
-          </a:blip>
-          <a:stretch>
-            <a:fillRect/>
-          </a:stretch>
-        </p:blipFill>
-        <p:spPr>
-          <a:xfrm>
-            <a:off x="480634" y="1852214"/>
-            <a:ext cx="612340" cy="612340"/>
-          </a:xfrm>
-          <a:prstGeom prst="rect">
-            <a:avLst/>
-          </a:prstGeom>
-        </p:spPr>
-      </p:pic>
-      <p:sp>
-        <p:nvSpPr>
-          <p:cNvPr id="11" name="TextBox 24">
-            <a:extLst>
-              <a:ext uri="{FF2B5EF4-FFF2-40B4-BE49-F238E27FC236}">
-                <a16:creationId xmlns:a16="http://schemas.microsoft.com/office/drawing/2014/main" id="{9CCF8B22-9361-7DA9-CAB9-E23D71E98A29}"/>
-              </a:ext>
-            </a:extLst>
-          </p:cNvPr>
-          <p:cNvSpPr txBox="1"/>
-          <p:nvPr/>
-        </p:nvSpPr>
-        <p:spPr>
-          <a:xfrm>
-            <a:off x="274924" y="4220210"/>
-            <a:ext cx="1005403" cy="369332"/>
-          </a:xfrm>
-          <a:prstGeom prst="rect">
-            <a:avLst/>
-          </a:prstGeom>
-          <a:noFill/>
-        </p:spPr>
-        <p:txBody>
-          <a:bodyPr wrap="none" rtlCol="0">
-            <a:spAutoFit/>
-          </a:bodyPr>
-          <a:lstStyle/>
-          <a:p>
-            <a:r>
-              <a:rPr lang="it-IT" dirty="0">
-                <a:latin typeface="CMU Serif" panose="02000603000000000000" pitchFamily="2" charset="0"/>
-                <a:ea typeface="CMU Serif" panose="02000603000000000000" pitchFamily="2" charset="0"/>
-                <a:cs typeface="CMU Serif" panose="02000603000000000000" pitchFamily="2" charset="0"/>
-              </a:rPr>
-              <a:t>Client </a:t>
-            </a:r>
-            <a:r>
-              <a:rPr lang="it-IT" dirty="0" err="1">
-                <a:latin typeface="CMU Serif" panose="02000603000000000000" pitchFamily="2" charset="0"/>
-                <a:ea typeface="CMU Serif" panose="02000603000000000000" pitchFamily="2" charset="0"/>
-                <a:cs typeface="CMU Serif" panose="02000603000000000000" pitchFamily="2" charset="0"/>
-              </a:rPr>
-              <a:t>n</a:t>
-            </a:r>
-            <a:endParaRPr lang="it-IT" dirty="0">
-              <a:latin typeface="CMU Serif" panose="02000603000000000000" pitchFamily="2" charset="0"/>
-              <a:ea typeface="CMU Serif" panose="02000603000000000000" pitchFamily="2" charset="0"/>
-              <a:cs typeface="CMU Serif" panose="02000603000000000000" pitchFamily="2" charset="0"/>
-            </a:endParaRPr>
-          </a:p>
-        </p:txBody>
-      </p:sp>
-      <p:pic>
-        <p:nvPicPr>
-          <p:cNvPr id="12" name="Picture 1" descr="A black background with a black square&#10;&#10;Description automatically generated with medium confidence">
-            <a:extLst>
-              <a:ext uri="{FF2B5EF4-FFF2-40B4-BE49-F238E27FC236}">
-                <a16:creationId xmlns:a16="http://schemas.microsoft.com/office/drawing/2014/main" id="{9CB2B143-11BD-B7F8-8858-22F111EB78B0}"/>
-              </a:ext>
-            </a:extLst>
-          </p:cNvPr>
-          <p:cNvPicPr>
-            <a:picLocks noChangeAspect="1"/>
-          </p:cNvPicPr>
-          <p:nvPr/>
-        </p:nvPicPr>
-        <p:blipFill>
-          <a:blip r:embed="rId2">
-            <a:extLst>
-              <a:ext uri="{28A0092B-C50C-407E-A947-70E740481C1C}">
-                <a14:useLocalDpi xmlns:a14="http://schemas.microsoft.com/office/drawing/2010/main" val="0"/>
-              </a:ext>
-            </a:extLst>
-          </a:blip>
-          <a:stretch>
-            <a:fillRect/>
-          </a:stretch>
-        </p:blipFill>
-        <p:spPr>
-          <a:xfrm>
-            <a:off x="480634" y="3593326"/>
-            <a:ext cx="612340" cy="612340"/>
-          </a:xfrm>
-          <a:prstGeom prst="rect">
-            <a:avLst/>
-          </a:prstGeom>
-        </p:spPr>
-      </p:pic>
-      <p:sp>
-        <p:nvSpPr>
-          <p:cNvPr id="13" name="Rettangolo con angoli arrotondati 12">
-            <a:extLst>
-              <a:ext uri="{FF2B5EF4-FFF2-40B4-BE49-F238E27FC236}">
-                <a16:creationId xmlns:a16="http://schemas.microsoft.com/office/drawing/2014/main" id="{F539821C-B54D-70D0-644B-F9FFE63AE9B8}"/>
-              </a:ext>
-            </a:extLst>
-          </p:cNvPr>
-          <p:cNvSpPr/>
-          <p:nvPr/>
-        </p:nvSpPr>
-        <p:spPr>
-          <a:xfrm>
-            <a:off x="274924" y="161366"/>
-            <a:ext cx="4001240" cy="4531658"/>
-          </a:xfrm>
-          <a:prstGeom prst="roundRect">
-            <a:avLst>
-              <a:gd name="adj" fmla="val 4232"/>
-            </a:avLst>
-          </a:prstGeom>
-          <a:noFill/>
-        </p:spPr>
-        <p:style>
-          <a:lnRef idx="2">
-            <a:schemeClr val="accent1">
-              <a:shade val="15000"/>
-            </a:schemeClr>
-          </a:lnRef>
-          <a:fillRef idx="1">
-            <a:schemeClr val="accent1"/>
-          </a:fillRef>
-          <a:effectRef idx="0">
-            <a:schemeClr val="accent1"/>
-          </a:effectRef>
-          <a:fontRef idx="minor">
-            <a:schemeClr val="lt1"/>
-          </a:fontRef>
-        </p:style>
-        <p:txBody>
-          <a:bodyPr rtlCol="0" anchor="ctr"/>
-          <a:lstStyle/>
-          <a:p>
-            <a:pPr algn="ctr"/>
-            <a:endParaRPr lang="it-IT"/>
-          </a:p>
-        </p:txBody>
-      </p:sp>
-      <p:sp>
-        <p:nvSpPr>
-          <p:cNvPr id="14" name="TextBox 24">
-            <a:extLst>
-              <a:ext uri="{FF2B5EF4-FFF2-40B4-BE49-F238E27FC236}">
-                <a16:creationId xmlns:a16="http://schemas.microsoft.com/office/drawing/2014/main" id="{B1D05C54-BB42-C960-B967-8CD0AA6A71E2}"/>
-              </a:ext>
-            </a:extLst>
-          </p:cNvPr>
-          <p:cNvSpPr txBox="1"/>
-          <p:nvPr/>
-        </p:nvSpPr>
-        <p:spPr>
-          <a:xfrm>
-            <a:off x="632305" y="216001"/>
-            <a:ext cx="3286477" cy="369332"/>
-          </a:xfrm>
-          <a:prstGeom prst="rect">
-            <a:avLst/>
-          </a:prstGeom>
-          <a:noFill/>
-        </p:spPr>
-        <p:txBody>
-          <a:bodyPr wrap="none" rtlCol="0">
-            <a:spAutoFit/>
-          </a:bodyPr>
-          <a:lstStyle/>
-          <a:p>
-            <a:r>
-              <a:rPr lang="it-IT" b="1" dirty="0">
-                <a:latin typeface="CMU Serif" panose="02000603000000000000" pitchFamily="2" charset="0"/>
-                <a:ea typeface="CMU Serif" panose="02000603000000000000" pitchFamily="2" charset="0"/>
-                <a:cs typeface="CMU Serif" panose="02000603000000000000" pitchFamily="2" charset="0"/>
-              </a:rPr>
-              <a:t>Federated Learning 𝑅final </a:t>
-            </a:r>
-          </a:p>
-        </p:txBody>
-      </p:sp>
-    </p:spTree>
-    <p:extLst>
-      <p:ext uri="{BB962C8B-B14F-4D97-AF65-F5344CB8AC3E}">
-        <p14:creationId xmlns:p14="http://schemas.microsoft.com/office/powerpoint/2010/main" val="1109060357"/>
-      </p:ext>
-    </p:extLst>
-  </p:cSld>
-  <p:clrMapOvr>
-    <a:masterClrMapping/>
-  </p:clrMapOvr>
-</p:sld>
-</file>
-
-<file path=ppt/slides/slide3.xml><?xml version="1.0" encoding="utf-8"?>
-<p:sld xmlns:a="http://schemas.openxmlformats.org/drawingml/2006/main" xmlns:r="http://schemas.openxmlformats.org/officeDocument/2006/relationships" xmlns:p="http://schemas.openxmlformats.org/presentationml/2006/main">
-  <p:cSld>
-    <p:spTree>
-      <p:nvGrpSpPr>
-        <p:cNvPr id="1" name="">
-          <a:extLst>
-            <a:ext uri="{FF2B5EF4-FFF2-40B4-BE49-F238E27FC236}">
-              <a16:creationId xmlns:a16="http://schemas.microsoft.com/office/drawing/2014/main" id="{FE2ED1FE-98FB-50D0-7A9E-07C5FB461179}"/>
-            </a:ext>
-          </a:extLst>
-        </p:cNvPr>
-        <p:cNvGrpSpPr/>
-        <p:nvPr/>
-      </p:nvGrpSpPr>
-      <p:grpSpPr>
-        <a:xfrm>
-          <a:off x="0" y="0"/>
-          <a:ext cx="0" cy="0"/>
-          <a:chOff x="0" y="0"/>
-          <a:chExt cx="0" cy="0"/>
-        </a:xfrm>
-      </p:grpSpPr>
-      <p:pic>
-        <p:nvPicPr>
-          <p:cNvPr id="4" name="Immagine 3">
-            <a:extLst>
-              <a:ext uri="{FF2B5EF4-FFF2-40B4-BE49-F238E27FC236}">
-                <a16:creationId xmlns:a16="http://schemas.microsoft.com/office/drawing/2014/main" id="{861154A8-9E87-F49F-8430-AF8FC4F478AD}"/>
-              </a:ext>
-            </a:extLst>
-          </p:cNvPr>
-          <p:cNvPicPr>
-            <a:picLocks noChangeAspect="1"/>
-          </p:cNvPicPr>
-          <p:nvPr/>
-        </p:nvPicPr>
-        <p:blipFill>
-          <a:blip r:embed="rId2"/>
-          <a:stretch>
-            <a:fillRect/>
-          </a:stretch>
-        </p:blipFill>
-        <p:spPr>
-          <a:xfrm>
-            <a:off x="2489145" y="1958545"/>
-            <a:ext cx="2730500" cy="2908300"/>
-          </a:xfrm>
-          <a:prstGeom prst="rect">
-            <a:avLst/>
-          </a:prstGeom>
-        </p:spPr>
-      </p:pic>
-      <p:sp>
-        <p:nvSpPr>
-          <p:cNvPr id="5" name="Ovale 4">
-            <a:extLst>
-              <a:ext uri="{FF2B5EF4-FFF2-40B4-BE49-F238E27FC236}">
-                <a16:creationId xmlns:a16="http://schemas.microsoft.com/office/drawing/2014/main" id="{94C11969-DFB8-4CE4-1338-35756B4EB997}"/>
-              </a:ext>
-            </a:extLst>
-          </p:cNvPr>
-          <p:cNvSpPr/>
-          <p:nvPr/>
-        </p:nvSpPr>
-        <p:spPr>
-          <a:xfrm>
-            <a:off x="3194985" y="3104179"/>
-            <a:ext cx="73092" cy="70385"/>
-          </a:xfrm>
-          <a:prstGeom prst="ellipse">
-            <a:avLst/>
-          </a:prstGeom>
-          <a:solidFill>
-            <a:schemeClr val="bg1"/>
-          </a:solidFill>
-          <a:ln w="3175">
-            <a:solidFill>
-              <a:schemeClr val="tx1"/>
-            </a:solidFill>
-          </a:ln>
-        </p:spPr>
-        <p:style>
-          <a:lnRef idx="2">
-            <a:schemeClr val="accent1">
-              <a:shade val="15000"/>
-            </a:schemeClr>
-          </a:lnRef>
-          <a:fillRef idx="1">
-            <a:schemeClr val="accent1"/>
-          </a:fillRef>
-          <a:effectRef idx="0">
-            <a:schemeClr val="accent1"/>
-          </a:effectRef>
-          <a:fontRef idx="minor">
-            <a:schemeClr val="lt1"/>
-          </a:fontRef>
-        </p:style>
-        <p:txBody>
-          <a:bodyPr rtlCol="0" anchor="ctr"/>
-          <a:lstStyle/>
-          <a:p>
-            <a:pPr algn="ctr"/>
-            <a:r>
-              <a:rPr lang="it-IT" sz="400" dirty="0">
-                <a:solidFill>
-                  <a:schemeClr val="tx1"/>
-                </a:solidFill>
-                <a:latin typeface="CMU Serif Roman" panose="02000603000000000000" pitchFamily="2" charset="0"/>
-                <a:ea typeface="CMU Serif Roman" panose="02000603000000000000" pitchFamily="2" charset="0"/>
-                <a:cs typeface="CMU Serif Roman" panose="02000603000000000000" pitchFamily="2" charset="0"/>
-              </a:rPr>
-              <a:t>1</a:t>
-            </a:r>
-          </a:p>
-        </p:txBody>
-      </p:sp>
-      <p:sp>
-        <p:nvSpPr>
-          <p:cNvPr id="6" name="Ovale 5">
-            <a:extLst>
-              <a:ext uri="{FF2B5EF4-FFF2-40B4-BE49-F238E27FC236}">
-                <a16:creationId xmlns:a16="http://schemas.microsoft.com/office/drawing/2014/main" id="{82B93430-FF2D-EDA2-9F96-49AB7595A211}"/>
-              </a:ext>
-            </a:extLst>
-          </p:cNvPr>
-          <p:cNvSpPr/>
-          <p:nvPr/>
-        </p:nvSpPr>
-        <p:spPr>
-          <a:xfrm>
-            <a:off x="4909485" y="3091478"/>
-            <a:ext cx="73092" cy="70385"/>
-          </a:xfrm>
-          <a:prstGeom prst="ellipse">
-            <a:avLst/>
-          </a:prstGeom>
-          <a:solidFill>
-            <a:schemeClr val="bg1"/>
-          </a:solidFill>
-          <a:ln w="3175">
-            <a:solidFill>
-              <a:schemeClr val="tx1"/>
-            </a:solidFill>
-          </a:ln>
-        </p:spPr>
-        <p:style>
-          <a:lnRef idx="2">
-            <a:schemeClr val="accent1">
-              <a:shade val="15000"/>
-            </a:schemeClr>
-          </a:lnRef>
-          <a:fillRef idx="1">
-            <a:schemeClr val="accent1"/>
-          </a:fillRef>
-          <a:effectRef idx="0">
-            <a:schemeClr val="accent1"/>
-          </a:effectRef>
-          <a:fontRef idx="minor">
-            <a:schemeClr val="lt1"/>
-          </a:fontRef>
-        </p:style>
-        <p:txBody>
-          <a:bodyPr rtlCol="0" anchor="ctr"/>
-          <a:lstStyle/>
-          <a:p>
-            <a:pPr algn="ctr"/>
-            <a:r>
-              <a:rPr lang="it-IT" sz="400" dirty="0">
-                <a:solidFill>
-                  <a:schemeClr val="tx1"/>
-                </a:solidFill>
-                <a:latin typeface="CMU Serif Roman" panose="02000603000000000000" pitchFamily="2" charset="0"/>
-                <a:ea typeface="CMU Serif Roman" panose="02000603000000000000" pitchFamily="2" charset="0"/>
-                <a:cs typeface="CMU Serif Roman" panose="02000603000000000000" pitchFamily="2" charset="0"/>
-              </a:rPr>
-              <a:t>2</a:t>
-            </a:r>
-          </a:p>
-        </p:txBody>
-      </p:sp>
-      <p:sp>
-        <p:nvSpPr>
-          <p:cNvPr id="7" name="Ovale 6">
-            <a:extLst>
-              <a:ext uri="{FF2B5EF4-FFF2-40B4-BE49-F238E27FC236}">
-                <a16:creationId xmlns:a16="http://schemas.microsoft.com/office/drawing/2014/main" id="{DA12902A-3373-7A17-32DB-FD866AE84882}"/>
-              </a:ext>
-            </a:extLst>
-          </p:cNvPr>
-          <p:cNvSpPr/>
-          <p:nvPr/>
-        </p:nvSpPr>
-        <p:spPr>
-          <a:xfrm>
-            <a:off x="3004485" y="3416300"/>
-            <a:ext cx="73092" cy="70385"/>
-          </a:xfrm>
-          <a:prstGeom prst="ellipse">
-            <a:avLst/>
-          </a:prstGeom>
-          <a:solidFill>
-            <a:schemeClr val="bg1"/>
-          </a:solidFill>
-          <a:ln w="3175">
-            <a:solidFill>
-              <a:schemeClr val="tx1"/>
-            </a:solidFill>
-          </a:ln>
-        </p:spPr>
-        <p:style>
-          <a:lnRef idx="2">
-            <a:schemeClr val="accent1">
-              <a:shade val="15000"/>
-            </a:schemeClr>
-          </a:lnRef>
-          <a:fillRef idx="1">
-            <a:schemeClr val="accent1"/>
-          </a:fillRef>
-          <a:effectRef idx="0">
-            <a:schemeClr val="accent1"/>
-          </a:effectRef>
-          <a:fontRef idx="minor">
-            <a:schemeClr val="lt1"/>
-          </a:fontRef>
-        </p:style>
-        <p:txBody>
-          <a:bodyPr rtlCol="0" anchor="ctr"/>
-          <a:lstStyle/>
-          <a:p>
-            <a:pPr algn="ctr"/>
-            <a:r>
-              <a:rPr lang="it-IT" sz="400" dirty="0">
-                <a:solidFill>
-                  <a:schemeClr val="tx1"/>
-                </a:solidFill>
-                <a:latin typeface="CMU Serif Roman" panose="02000603000000000000" pitchFamily="2" charset="0"/>
-                <a:ea typeface="CMU Serif Roman" panose="02000603000000000000" pitchFamily="2" charset="0"/>
-                <a:cs typeface="CMU Serif Roman" panose="02000603000000000000" pitchFamily="2" charset="0"/>
-              </a:rPr>
-              <a:t>3</a:t>
-            </a:r>
-          </a:p>
-        </p:txBody>
-      </p:sp>
-      <p:sp>
-        <p:nvSpPr>
-          <p:cNvPr id="8" name="Ovale 7">
-            <a:extLst>
-              <a:ext uri="{FF2B5EF4-FFF2-40B4-BE49-F238E27FC236}">
-                <a16:creationId xmlns:a16="http://schemas.microsoft.com/office/drawing/2014/main" id="{166173AB-76FE-2314-797E-458B74EC023C}"/>
-              </a:ext>
-            </a:extLst>
-          </p:cNvPr>
-          <p:cNvSpPr/>
-          <p:nvPr/>
-        </p:nvSpPr>
-        <p:spPr>
-          <a:xfrm>
-            <a:off x="3372785" y="3916978"/>
-            <a:ext cx="73092" cy="70385"/>
-          </a:xfrm>
-          <a:prstGeom prst="ellipse">
-            <a:avLst/>
-          </a:prstGeom>
-          <a:solidFill>
-            <a:schemeClr val="bg1"/>
-          </a:solidFill>
-          <a:ln w="3175">
-            <a:solidFill>
-              <a:schemeClr val="tx1"/>
-            </a:solidFill>
-          </a:ln>
-        </p:spPr>
-        <p:style>
-          <a:lnRef idx="2">
-            <a:schemeClr val="accent1">
-              <a:shade val="15000"/>
-            </a:schemeClr>
-          </a:lnRef>
-          <a:fillRef idx="1">
-            <a:schemeClr val="accent1"/>
-          </a:fillRef>
-          <a:effectRef idx="0">
-            <a:schemeClr val="accent1"/>
-          </a:effectRef>
-          <a:fontRef idx="minor">
-            <a:schemeClr val="lt1"/>
-          </a:fontRef>
-        </p:style>
-        <p:txBody>
-          <a:bodyPr rtlCol="0" anchor="ctr"/>
-          <a:lstStyle/>
-          <a:p>
-            <a:pPr algn="ctr"/>
-            <a:r>
-              <a:rPr lang="it-IT" sz="400" dirty="0">
-                <a:solidFill>
-                  <a:schemeClr val="tx1"/>
-                </a:solidFill>
-                <a:latin typeface="CMU Serif Roman" panose="02000603000000000000" pitchFamily="2" charset="0"/>
-                <a:ea typeface="CMU Serif Roman" panose="02000603000000000000" pitchFamily="2" charset="0"/>
-                <a:cs typeface="CMU Serif Roman" panose="02000603000000000000" pitchFamily="2" charset="0"/>
-              </a:rPr>
-              <a:t>4</a:t>
-            </a:r>
-          </a:p>
-        </p:txBody>
-      </p:sp>
-    </p:spTree>
-    <p:extLst>
-      <p:ext uri="{BB962C8B-B14F-4D97-AF65-F5344CB8AC3E}">
-        <p14:creationId xmlns:p14="http://schemas.microsoft.com/office/powerpoint/2010/main" val="3826319958"/>
-      </p:ext>
-    </p:extLst>
-  </p:cSld>
-  <p:clrMapOvr>
-    <a:masterClrMapping/>
-  </p:clrMapOvr>
-</p:sld>
-</file>
-
-<file path=ppt/slides/slide4.xml><?xml version="1.0" encoding="utf-8"?>
-<p:sld xmlns:a="http://schemas.openxmlformats.org/drawingml/2006/main" xmlns:r="http://schemas.openxmlformats.org/officeDocument/2006/relationships" xmlns:p="http://schemas.openxmlformats.org/presentationml/2006/main">
-  <p:cSld>
-    <p:spTree>
-      <p:nvGrpSpPr>
-        <p:cNvPr id="1" name="">
-          <a:extLst>
-            <a:ext uri="{FF2B5EF4-FFF2-40B4-BE49-F238E27FC236}">
-              <a16:creationId xmlns:a16="http://schemas.microsoft.com/office/drawing/2014/main" id="{07368779-E6B1-3D2B-CEE6-4EABC48692D6}"/>
-            </a:ext>
-          </a:extLst>
-        </p:cNvPr>
-        <p:cNvGrpSpPr/>
-        <p:nvPr/>
-      </p:nvGrpSpPr>
-      <p:grpSpPr>
-        <a:xfrm>
-          <a:off x="0" y="0"/>
-          <a:ext cx="0" cy="0"/>
-          <a:chOff x="0" y="0"/>
-          <a:chExt cx="0" cy="0"/>
-        </a:xfrm>
-      </p:grpSpPr>
-      <p:pic>
-        <p:nvPicPr>
-          <p:cNvPr id="4" name="Immagine 3">
-            <a:extLst>
-              <a:ext uri="{FF2B5EF4-FFF2-40B4-BE49-F238E27FC236}">
-                <a16:creationId xmlns:a16="http://schemas.microsoft.com/office/drawing/2014/main" id="{DB5C9964-5650-8323-D3BC-9BF520FAC748}"/>
-              </a:ext>
-            </a:extLst>
-          </p:cNvPr>
-          <p:cNvPicPr>
-            <a:picLocks noChangeAspect="1"/>
-          </p:cNvPicPr>
-          <p:nvPr/>
-        </p:nvPicPr>
-        <p:blipFill>
-          <a:blip r:embed="rId2"/>
-          <a:stretch>
-            <a:fillRect/>
-          </a:stretch>
-        </p:blipFill>
-        <p:spPr>
-          <a:xfrm>
-            <a:off x="237565" y="621553"/>
-            <a:ext cx="7772400" cy="5181600"/>
-          </a:xfrm>
-          <a:prstGeom prst="rect">
-            <a:avLst/>
-          </a:prstGeom>
-        </p:spPr>
-      </p:pic>
-    </p:spTree>
-    <p:extLst>
-      <p:ext uri="{BB962C8B-B14F-4D97-AF65-F5344CB8AC3E}">
-        <p14:creationId xmlns:p14="http://schemas.microsoft.com/office/powerpoint/2010/main" val="2574211355"/>
-      </p:ext>
-    </p:extLst>
-  </p:cSld>
-  <p:clrMapOvr>
-    <a:masterClrMapping/>
-  </p:clrMapOvr>
-</p:sld>
-</file>
-
-<file path=ppt/slides/slide5.xml><?xml version="1.0" encoding="utf-8"?>
-<p:sld xmlns:a="http://schemas.openxmlformats.org/drawingml/2006/main" xmlns:r="http://schemas.openxmlformats.org/officeDocument/2006/relationships" xmlns:p="http://schemas.openxmlformats.org/presentationml/2006/main">
-  <p:cSld>
-    <p:spTree>
-      <p:nvGrpSpPr>
-        <p:cNvPr id="1" name="">
-          <a:extLst>
-            <a:ext uri="{FF2B5EF4-FFF2-40B4-BE49-F238E27FC236}">
-              <a16:creationId xmlns:a16="http://schemas.microsoft.com/office/drawing/2014/main" id="{63050DE9-43E4-DED5-037E-A14FE6A162CB}"/>
-            </a:ext>
-          </a:extLst>
-        </p:cNvPr>
-        <p:cNvGrpSpPr/>
-        <p:nvPr/>
-      </p:nvGrpSpPr>
-      <p:grpSpPr>
-        <a:xfrm>
-          <a:off x="0" y="0"/>
-          <a:ext cx="0" cy="0"/>
-          <a:chOff x="0" y="0"/>
-          <a:chExt cx="0" cy="0"/>
-        </a:xfrm>
-      </p:grpSpPr>
-      <p:pic>
-        <p:nvPicPr>
-          <p:cNvPr id="14" name="Immagine 13">
-            <a:extLst>
-              <a:ext uri="{FF2B5EF4-FFF2-40B4-BE49-F238E27FC236}">
-                <a16:creationId xmlns:a16="http://schemas.microsoft.com/office/drawing/2014/main" id="{3F894B46-2947-03E2-AC28-B4C403E9E520}"/>
-              </a:ext>
-            </a:extLst>
-          </p:cNvPr>
-          <p:cNvPicPr>
-            <a:picLocks noChangeAspect="1"/>
-          </p:cNvPicPr>
-          <p:nvPr/>
-        </p:nvPicPr>
-        <p:blipFill>
-          <a:blip r:embed="rId2"/>
-          <a:srcRect l="12563" t="20915" r="10868" b="26974"/>
-          <a:stretch>
-            <a:fillRect/>
-          </a:stretch>
-        </p:blipFill>
-        <p:spPr>
-          <a:xfrm>
-            <a:off x="201477" y="185980"/>
-            <a:ext cx="8785325" cy="3363132"/>
-          </a:xfrm>
-          <a:prstGeom prst="rect">
-            <a:avLst/>
-          </a:prstGeom>
-        </p:spPr>
-      </p:pic>
-      <p:pic>
-        <p:nvPicPr>
-          <p:cNvPr id="15" name="Immagine 14">
-            <a:extLst>
-              <a:ext uri="{FF2B5EF4-FFF2-40B4-BE49-F238E27FC236}">
-                <a16:creationId xmlns:a16="http://schemas.microsoft.com/office/drawing/2014/main" id="{1EA03820-7A5B-5BD1-BF68-7E07DFF8840E}"/>
-              </a:ext>
-            </a:extLst>
-          </p:cNvPr>
-          <p:cNvPicPr>
-            <a:picLocks noChangeAspect="1"/>
-          </p:cNvPicPr>
-          <p:nvPr/>
-        </p:nvPicPr>
-        <p:blipFill>
-          <a:blip r:embed="rId2"/>
-          <a:srcRect l="58106" t="36324" r="11637" b="26974"/>
-          <a:stretch>
-            <a:fillRect/>
-          </a:stretch>
-        </p:blipFill>
-        <p:spPr>
-          <a:xfrm>
-            <a:off x="7780150" y="3549112"/>
-            <a:ext cx="3471620" cy="2368658"/>
-          </a:xfrm>
-          <a:prstGeom prst="rect">
-            <a:avLst/>
-          </a:prstGeom>
-        </p:spPr>
-      </p:pic>
-    </p:spTree>
-    <p:extLst>
-      <p:ext uri="{BB962C8B-B14F-4D97-AF65-F5344CB8AC3E}">
-        <p14:creationId xmlns:p14="http://schemas.microsoft.com/office/powerpoint/2010/main" val="7542601"/>
-      </p:ext>
-    </p:extLst>
-  </p:cSld>
-  <p:clrMapOvr>
-    <a:masterClrMapping/>
-  </p:clrMapOvr>
-</p:sld>
-</file>
-
-<file path=ppt/slides/slide6.xml><?xml version="1.0" encoding="utf-8"?>
-<p:sld xmlns:a="http://schemas.openxmlformats.org/drawingml/2006/main" xmlns:r="http://schemas.openxmlformats.org/officeDocument/2006/relationships" xmlns:p="http://schemas.openxmlformats.org/presentationml/2006/main">
-  <p:cSld>
-    <p:spTree>
-      <p:nvGrpSpPr>
-        <p:cNvPr id="1" name="">
-          <a:extLst>
-            <a:ext uri="{FF2B5EF4-FFF2-40B4-BE49-F238E27FC236}">
-              <a16:creationId xmlns:a16="http://schemas.microsoft.com/office/drawing/2014/main" id="{E034129C-EE6D-B8A8-2BFC-01224472FD7E}"/>
-            </a:ext>
-          </a:extLst>
-        </p:cNvPr>
-        <p:cNvGrpSpPr/>
-        <p:nvPr/>
-      </p:nvGrpSpPr>
-      <p:grpSpPr>
-        <a:xfrm>
-          <a:off x="0" y="0"/>
-          <a:ext cx="0" cy="0"/>
-          <a:chOff x="0" y="0"/>
-          <a:chExt cx="0" cy="0"/>
-        </a:xfrm>
-      </p:grpSpPr>
-      <p:pic>
-        <p:nvPicPr>
-          <p:cNvPr id="9" name="Immagine 8">
-            <a:extLst>
-              <a:ext uri="{FF2B5EF4-FFF2-40B4-BE49-F238E27FC236}">
-                <a16:creationId xmlns:a16="http://schemas.microsoft.com/office/drawing/2014/main" id="{5131CD9F-4CBD-5FA1-4098-F31FFA7D72C5}"/>
-              </a:ext>
-            </a:extLst>
-          </p:cNvPr>
-          <p:cNvPicPr>
-            <a:picLocks noChangeAspect="1"/>
-          </p:cNvPicPr>
-          <p:nvPr/>
-        </p:nvPicPr>
-        <p:blipFill>
-          <a:blip r:embed="rId2"/>
-          <a:srcRect l="12808" t="22242" r="57614" b="27813"/>
-          <a:stretch>
-            <a:fillRect/>
-          </a:stretch>
-        </p:blipFill>
-        <p:spPr>
-          <a:xfrm>
-            <a:off x="173621" y="127321"/>
-            <a:ext cx="3229336" cy="3067291"/>
-          </a:xfrm>
-          <a:prstGeom prst="rect">
-            <a:avLst/>
-          </a:prstGeom>
-        </p:spPr>
-      </p:pic>
-      <p:pic>
-        <p:nvPicPr>
-          <p:cNvPr id="2" name="Immagine 1">
-            <a:extLst>
-              <a:ext uri="{FF2B5EF4-FFF2-40B4-BE49-F238E27FC236}">
-                <a16:creationId xmlns:a16="http://schemas.microsoft.com/office/drawing/2014/main" id="{65D6FC5E-C9A3-219D-E216-3FDE5FBBE802}"/>
-              </a:ext>
-            </a:extLst>
-          </p:cNvPr>
-          <p:cNvPicPr>
-            <a:picLocks noChangeAspect="1"/>
-          </p:cNvPicPr>
-          <p:nvPr/>
-        </p:nvPicPr>
-        <p:blipFill>
-          <a:blip r:embed="rId2"/>
-          <a:srcRect l="44011" t="59181" r="44221" b="27437"/>
-          <a:stretch>
-            <a:fillRect/>
-          </a:stretch>
-        </p:blipFill>
-        <p:spPr>
-          <a:xfrm>
-            <a:off x="706055" y="4120587"/>
-            <a:ext cx="1284791" cy="821803"/>
-          </a:xfrm>
-          <a:prstGeom prst="rect">
-            <a:avLst/>
-          </a:prstGeom>
-        </p:spPr>
-      </p:pic>
-      <p:pic>
-        <p:nvPicPr>
-          <p:cNvPr id="5" name="Immagine 4">
-            <a:extLst>
-              <a:ext uri="{FF2B5EF4-FFF2-40B4-BE49-F238E27FC236}">
-                <a16:creationId xmlns:a16="http://schemas.microsoft.com/office/drawing/2014/main" id="{BF7EC932-D148-A3EE-1007-AEA3E315C751}"/>
-              </a:ext>
-            </a:extLst>
-          </p:cNvPr>
-          <p:cNvPicPr>
-            <a:picLocks noChangeAspect="1"/>
-          </p:cNvPicPr>
-          <p:nvPr/>
-        </p:nvPicPr>
-        <p:blipFill>
-          <a:blip r:embed="rId2"/>
-          <a:srcRect l="56315" t="21952" r="33125" b="60212"/>
-          <a:stretch>
-            <a:fillRect/>
-          </a:stretch>
-        </p:blipFill>
-        <p:spPr>
-          <a:xfrm>
-            <a:off x="5121060" y="1113278"/>
-            <a:ext cx="1153007" cy="1095376"/>
-          </a:xfrm>
-          <a:prstGeom prst="rect">
-            <a:avLst/>
-          </a:prstGeom>
-        </p:spPr>
-      </p:pic>
-      <p:grpSp>
-        <p:nvGrpSpPr>
-          <p:cNvPr id="8" name="Gruppo 7">
-            <a:extLst>
-              <a:ext uri="{FF2B5EF4-FFF2-40B4-BE49-F238E27FC236}">
-                <a16:creationId xmlns:a16="http://schemas.microsoft.com/office/drawing/2014/main" id="{ABF2DD0A-9F83-1BE8-6221-469AC60A4DDC}"/>
-              </a:ext>
-            </a:extLst>
-          </p:cNvPr>
-          <p:cNvGrpSpPr/>
-          <p:nvPr/>
-        </p:nvGrpSpPr>
-        <p:grpSpPr>
-          <a:xfrm>
-            <a:off x="3402957" y="3593530"/>
-            <a:ext cx="3936569" cy="2697719"/>
-            <a:chOff x="7253207" y="3429000"/>
-            <a:chExt cx="3936569" cy="2697719"/>
-          </a:xfrm>
-        </p:grpSpPr>
-        <p:pic>
-          <p:nvPicPr>
-            <p:cNvPr id="6" name="Immagine 5">
-              <a:extLst>
-                <a:ext uri="{FF2B5EF4-FFF2-40B4-BE49-F238E27FC236}">
-                  <a16:creationId xmlns:a16="http://schemas.microsoft.com/office/drawing/2014/main" id="{8B69B2E8-791D-7BAA-3207-1CC78259D90F}"/>
-                </a:ext>
-              </a:extLst>
-            </p:cNvPr>
-            <p:cNvPicPr>
-              <a:picLocks noChangeAspect="1"/>
-            </p:cNvPicPr>
-            <p:nvPr/>
-          </p:nvPicPr>
-          <p:blipFill>
-            <a:blip r:embed="rId3"/>
-            <a:srcRect l="58106" t="36324" r="11637" b="26974"/>
-            <a:stretch>
-              <a:fillRect/>
-            </a:stretch>
-          </p:blipFill>
-          <p:spPr>
-            <a:xfrm>
-              <a:off x="7718156" y="3758061"/>
-              <a:ext cx="3471620" cy="2368658"/>
-            </a:xfrm>
-            <a:prstGeom prst="foldedCorner">
-              <a:avLst/>
-            </a:prstGeom>
-          </p:spPr>
-        </p:pic>
-        <p:sp>
-          <p:nvSpPr>
-            <p:cNvPr id="7" name="Rettangolo 6">
-              <a:extLst>
-                <a:ext uri="{FF2B5EF4-FFF2-40B4-BE49-F238E27FC236}">
-                  <a16:creationId xmlns:a16="http://schemas.microsoft.com/office/drawing/2014/main" id="{AFCF9965-D579-5A80-51D9-DE3B75F05AA9}"/>
-                </a:ext>
-              </a:extLst>
-            </p:cNvPr>
-            <p:cNvSpPr/>
-            <p:nvPr/>
-          </p:nvSpPr>
-          <p:spPr>
-            <a:xfrm>
-              <a:off x="7253207" y="3429000"/>
-              <a:ext cx="1766807" cy="691587"/>
-            </a:xfrm>
-            <a:prstGeom prst="rect">
-              <a:avLst/>
-            </a:prstGeom>
-            <a:solidFill>
-              <a:schemeClr val="bg1"/>
-            </a:solidFill>
-            <a:ln>
-              <a:solidFill>
-                <a:schemeClr val="bg1"/>
-              </a:solidFill>
-            </a:ln>
-          </p:spPr>
-          <p:style>
-            <a:lnRef idx="2">
-              <a:schemeClr val="accent1">
-                <a:shade val="15000"/>
-              </a:schemeClr>
-            </a:lnRef>
-            <a:fillRef idx="1">
-              <a:schemeClr val="accent1"/>
-            </a:fillRef>
-            <a:effectRef idx="0">
-              <a:schemeClr val="accent1"/>
-            </a:effectRef>
-            <a:fontRef idx="minor">
-              <a:schemeClr val="lt1"/>
-            </a:fontRef>
-          </p:style>
-          <p:txBody>
-            <a:bodyPr rtlCol="0" anchor="ctr"/>
-            <a:lstStyle/>
-            <a:p>
-              <a:pPr algn="ctr"/>
-              <a:endParaRPr lang="it-IT"/>
-            </a:p>
-          </p:txBody>
-        </p:sp>
-      </p:grpSp>
-    </p:spTree>
-    <p:extLst>
-      <p:ext uri="{BB962C8B-B14F-4D97-AF65-F5344CB8AC3E}">
-        <p14:creationId xmlns:p14="http://schemas.microsoft.com/office/powerpoint/2010/main" val="3923183"/>
       </p:ext>
     </p:extLst>
   </p:cSld>
